--- a/brand_context/templates/linkedin-carousel/_preview/carousel-simplicity-beats-sophistication.pptx
+++ b/brand_context/templates/linkedin-carousel/_preview/carousel-simplicity-beats-sophistication.pptx
@@ -3230,7 +3230,7 @@
               </a:defRPr>
             </a:pPr>
             <a:r>
-              <a:t>@SIMONSCRAPES</a:t>
+              <a:t>{{handle}}</a:t>
             </a:r>
           </a:p>
         </p:txBody>
@@ -3266,7 +3266,7 @@
               </a:defRPr>
             </a:pPr>
             <a:r>
-              <a:t>WEB SCRAPING &amp; AUTOMATION</a:t>
+              <a:t>{{tagline}}</a:t>
             </a:r>
           </a:p>
         </p:txBody>
@@ -3968,7 +3968,7 @@
               </a:defRPr>
             </a:pPr>
             <a:r>
-              <a:t>@SIMONSCRAPES</a:t>
+              <a:t>{{handle}}</a:t>
             </a:r>
           </a:p>
         </p:txBody>
@@ -4004,7 +4004,7 @@
               </a:defRPr>
             </a:pPr>
             <a:r>
-              <a:t>WEB SCRAPING &amp; AUTOMATION</a:t>
+              <a:t>{{tagline}}</a:t>
             </a:r>
           </a:p>
         </p:txBody>
@@ -4819,7 +4819,7 @@
               </a:defRPr>
             </a:pPr>
             <a:r>
-              <a:t>@SIMONSCRAPES</a:t>
+              <a:t>{{handle}}</a:t>
             </a:r>
           </a:p>
         </p:txBody>
@@ -4855,7 +4855,7 @@
               </a:defRPr>
             </a:pPr>
             <a:r>
-              <a:t>WEB SCRAPING &amp; AUTOMATION</a:t>
+              <a:t>{{tagline}}</a:t>
             </a:r>
           </a:p>
         </p:txBody>
@@ -5647,7 +5647,7 @@
               </a:defRPr>
             </a:pPr>
             <a:r>
-              <a:t>@SIMONSCRAPES</a:t>
+              <a:t>{{handle}}</a:t>
             </a:r>
           </a:p>
         </p:txBody>
@@ -5683,7 +5683,7 @@
               </a:defRPr>
             </a:pPr>
             <a:r>
-              <a:t>WEB SCRAPING &amp; AUTOMATION</a:t>
+              <a:t>{{tagline}}</a:t>
             </a:r>
           </a:p>
         </p:txBody>
@@ -6719,7 +6719,7 @@
               </a:defRPr>
             </a:pPr>
             <a:r>
-              <a:t>@SIMONSCRAPES</a:t>
+              <a:t>{{handle}}</a:t>
             </a:r>
           </a:p>
         </p:txBody>
@@ -6755,7 +6755,7 @@
               </a:defRPr>
             </a:pPr>
             <a:r>
-              <a:t>WEB SCRAPING &amp; AUTOMATION</a:t>
+              <a:t>{{tagline}}</a:t>
             </a:r>
           </a:p>
         </p:txBody>
@@ -7847,7 +7847,7 @@
               </a:defRPr>
             </a:pPr>
             <a:r>
-              <a:t>@SIMONSCRAPES</a:t>
+              <a:t>{{handle}}</a:t>
             </a:r>
           </a:p>
         </p:txBody>
@@ -7883,7 +7883,7 @@
               </a:defRPr>
             </a:pPr>
             <a:r>
-              <a:t>WEB SCRAPING &amp; AUTOMATION</a:t>
+              <a:t>{{tagline}}</a:t>
             </a:r>
           </a:p>
         </p:txBody>
@@ -9015,7 +9015,7 @@
               </a:defRPr>
             </a:pPr>
             <a:r>
-              <a:t>@SIMONSCRAPES</a:t>
+              <a:t>{{handle}}</a:t>
             </a:r>
           </a:p>
         </p:txBody>
@@ -9051,7 +9051,7 @@
               </a:defRPr>
             </a:pPr>
             <a:r>
-              <a:t>WEB SCRAPING &amp; AUTOMATION</a:t>
+              <a:t>{{tagline}}</a:t>
             </a:r>
           </a:p>
         </p:txBody>
@@ -9301,7 +9301,7 @@
               </a:defRPr>
             </a:pPr>
             <a:r>
-              <a:t>@simonscrapes</a:t>
+              <a:t>{{brand_name}}</a:t>
             </a:r>
           </a:p>
         </p:txBody>
@@ -9337,7 +9337,7 @@
               </a:defRPr>
             </a:pPr>
             <a:r>
-              <a:t>web scraping &amp; automation</a:t>
+              <a:t>{{tagline}}</a:t>
             </a:r>
           </a:p>
         </p:txBody>
